--- a/data-eng/decks/w4d4s3.pptx
+++ b/data-eng/decks/w4d4s3.pptx
@@ -3100,7 +3100,7 @@
       <p:grpSpPr/>
       <p:sp>
         <p:nvSpPr>
-          <p:cNvPr id="2" name="Oval 1"/>
+          <p:cNvPr id="2" name="deckgen:decor"/>
           <p:cNvSpPr/>
           <p:nvPr/>
         </p:nvSpPr>
@@ -3130,7 +3130,7 @@
       </p:sp>
       <p:sp>
         <p:nvSpPr>
-          <p:cNvPr id="3" name="Oval 2"/>
+          <p:cNvPr id="3" name="deckgen:decor"/>
           <p:cNvSpPr/>
           <p:nvPr/>
         </p:nvSpPr>
@@ -3160,7 +3160,7 @@
       </p:sp>
       <p:sp>
         <p:nvSpPr>
-          <p:cNvPr id="4" name="Oval 3"/>
+          <p:cNvPr id="4" name="deckgen:decor"/>
           <p:cNvSpPr/>
           <p:nvPr/>
         </p:nvSpPr>
@@ -3190,7 +3190,7 @@
       </p:sp>
       <p:sp>
         <p:nvSpPr>
-          <p:cNvPr id="5" name="Rectangle 4"/>
+          <p:cNvPr id="5" name="deckgen:decor"/>
           <p:cNvSpPr/>
           <p:nvPr/>
         </p:nvSpPr>
@@ -3220,7 +3220,7 @@
       </p:sp>
       <p:sp>
         <p:nvSpPr>
-          <p:cNvPr id="6" name="Oval 5"/>
+          <p:cNvPr id="6" name="deckgen:decor"/>
           <p:cNvSpPr/>
           <p:nvPr/>
         </p:nvSpPr>
@@ -3250,7 +3250,7 @@
       </p:sp>
       <p:sp>
         <p:nvSpPr>
-          <p:cNvPr id="7" name="Oval 6"/>
+          <p:cNvPr id="7" name="deckgen:decor"/>
           <p:cNvSpPr/>
           <p:nvPr/>
         </p:nvSpPr>
@@ -3280,7 +3280,7 @@
       </p:sp>
       <p:sp>
         <p:nvSpPr>
-          <p:cNvPr id="8" name="Oval 7"/>
+          <p:cNvPr id="8" name="deckgen:decor"/>
           <p:cNvSpPr/>
           <p:nvPr/>
         </p:nvSpPr>
@@ -3310,7 +3310,7 @@
       </p:sp>
       <p:sp>
         <p:nvSpPr>
-          <p:cNvPr id="9" name="Oval 8"/>
+          <p:cNvPr id="9" name="deckgen:decor"/>
           <p:cNvSpPr/>
           <p:nvPr/>
         </p:nvSpPr>
@@ -3340,7 +3340,7 @@
       </p:sp>
       <p:sp>
         <p:nvSpPr>
-          <p:cNvPr id="10" name="Rectangle 9"/>
+          <p:cNvPr id="10" name="deckgen:decor"/>
           <p:cNvSpPr/>
           <p:nvPr/>
         </p:nvSpPr>
@@ -3600,7 +3600,7 @@
       <p:grpSpPr/>
       <p:sp>
         <p:nvSpPr>
-          <p:cNvPr id="2" name="Oval 1"/>
+          <p:cNvPr id="2" name="deckgen:decor"/>
           <p:cNvSpPr/>
           <p:nvPr/>
         </p:nvSpPr>
@@ -3630,7 +3630,7 @@
       </p:sp>
       <p:sp>
         <p:nvSpPr>
-          <p:cNvPr id="3" name="Oval 2"/>
+          <p:cNvPr id="3" name="deckgen:decor"/>
           <p:cNvSpPr/>
           <p:nvPr/>
         </p:nvSpPr>
@@ -3660,7 +3660,7 @@
       </p:sp>
       <p:sp>
         <p:nvSpPr>
-          <p:cNvPr id="4" name="Oval 3"/>
+          <p:cNvPr id="4" name="deckgen:decor"/>
           <p:cNvSpPr/>
           <p:nvPr/>
         </p:nvSpPr>
@@ -3808,12 +3808,12 @@
         </p:nvSpPr>
         <p:spPr>
           <a:xfrm>
-            <a:off x="1143000" y="2990850"/>
-            <a:ext cx="16002000" cy="819150"/>
+            <a:off x="1143000" y="2867025"/>
+            <a:ext cx="16002000" cy="742950"/>
           </a:xfrm>
           <a:prstGeom prst="roundRect">
             <a:avLst>
-              <a:gd name="adj" fmla="val 5813"/>
+              <a:gd name="adj" fmla="val 6410"/>
             </a:avLst>
           </a:prstGeom>
           <a:solidFill>
@@ -3842,7 +3842,7 @@
         </p:nvSpPr>
         <p:spPr>
           <a:xfrm>
-            <a:off x="1390650" y="3133725"/>
+            <a:off x="1390650" y="2971800"/>
             <a:ext cx="533400" cy="533400"/>
           </a:xfrm>
           <a:prstGeom prst="ellipse">
@@ -3872,7 +3872,7 @@
         </p:nvSpPr>
         <p:spPr>
           <a:xfrm>
-            <a:off x="1390650" y="3257550"/>
+            <a:off x="1390650" y="3095625"/>
             <a:ext cx="533400" cy="323850"/>
           </a:xfrm>
           <a:prstGeom prst="rect">
@@ -3913,8 +3913,8 @@
         </p:nvSpPr>
         <p:spPr>
           <a:xfrm>
-            <a:off x="2190750" y="2990850"/>
-            <a:ext cx="14573250" cy="819150"/>
+            <a:off x="2190750" y="2867025"/>
+            <a:ext cx="14573250" cy="742950"/>
           </a:xfrm>
           <a:prstGeom prst="rect">
             <a:avLst/>
@@ -3933,7 +3933,7 @@
               </a:lnSpc>
             </a:pPr>
             <a:r>
-              <a:rPr sz="2325" b="1">
+              <a:rPr sz="2100" b="1">
                 <a:solidFill>
                   <a:srgbClr val="0D2B5E"/>
                 </a:solidFill>
@@ -3941,7 +3941,7 @@
                 <a:ea typeface="Pretendard"/>
                 <a:cs typeface="Pretendard"/>
               </a:rPr>
-              <a:t>집계 세 쿼리가 모두 동작한다</a:t>
+              <a:t>집계 세 쿼리 — 고객별 6행 · 날짜·채널 5행 · 누적 6행</a:t>
             </a:r>
           </a:p>
         </p:txBody>
@@ -3954,12 +3954,12 @@
         </p:nvSpPr>
         <p:spPr>
           <a:xfrm>
-            <a:off x="1143000" y="3981450"/>
-            <a:ext cx="16002000" cy="819150"/>
+            <a:off x="1143000" y="3724275"/>
+            <a:ext cx="16002000" cy="742950"/>
           </a:xfrm>
           <a:prstGeom prst="roundRect">
             <a:avLst>
-              <a:gd name="adj" fmla="val 5813"/>
+              <a:gd name="adj" fmla="val 6410"/>
             </a:avLst>
           </a:prstGeom>
           <a:solidFill>
@@ -3988,7 +3988,7 @@
         </p:nvSpPr>
         <p:spPr>
           <a:xfrm>
-            <a:off x="1390650" y="4124325"/>
+            <a:off x="1390650" y="3829050"/>
             <a:ext cx="533400" cy="533400"/>
           </a:xfrm>
           <a:prstGeom prst="ellipse">
@@ -4018,7 +4018,7 @@
         </p:nvSpPr>
         <p:spPr>
           <a:xfrm>
-            <a:off x="1390650" y="4248150"/>
+            <a:off x="1390650" y="3952875"/>
             <a:ext cx="533400" cy="323850"/>
           </a:xfrm>
           <a:prstGeom prst="rect">
@@ -4059,8 +4059,8 @@
         </p:nvSpPr>
         <p:spPr>
           <a:xfrm>
-            <a:off x="2190750" y="3981450"/>
-            <a:ext cx="14573250" cy="819150"/>
+            <a:off x="2190750" y="3724275"/>
+            <a:ext cx="14573250" cy="742950"/>
           </a:xfrm>
           <a:prstGeom prst="rect">
             <a:avLst/>
@@ -4079,7 +4079,7 @@
               </a:lnSpc>
             </a:pPr>
             <a:r>
-              <a:rPr sz="2325" b="1">
+              <a:rPr sz="2100" b="1">
                 <a:solidFill>
                   <a:srgbClr val="0D2B5E"/>
                 </a:solidFill>
@@ -4087,7 +4087,7 @@
                 <a:ea typeface="Pretendard"/>
                 <a:cs typeface="Pretendard"/>
               </a:rPr>
-              <a:t>daily_sales 가 Spark 에서도 보이고 warehouse 에 파일이 생겼다</a:t>
+              <a:t>daily_sales 세 줄이 Spark 에서도 같고 폴더가 생겼다</a:t>
             </a:r>
           </a:p>
         </p:txBody>
@@ -4100,12 +4100,12 @@
         </p:nvSpPr>
         <p:spPr>
           <a:xfrm>
-            <a:off x="1143000" y="4972050"/>
-            <a:ext cx="16002000" cy="819150"/>
+            <a:off x="1143000" y="4581525"/>
+            <a:ext cx="16002000" cy="742950"/>
           </a:xfrm>
           <a:prstGeom prst="roundRect">
             <a:avLst>
-              <a:gd name="adj" fmla="val 5813"/>
+              <a:gd name="adj" fmla="val 6410"/>
             </a:avLst>
           </a:prstGeom>
           <a:solidFill>
@@ -4134,7 +4134,7 @@
         </p:nvSpPr>
         <p:spPr>
           <a:xfrm>
-            <a:off x="1390650" y="5114925"/>
+            <a:off x="1390650" y="4686300"/>
             <a:ext cx="533400" cy="533400"/>
           </a:xfrm>
           <a:prstGeom prst="ellipse">
@@ -4164,7 +4164,7 @@
         </p:nvSpPr>
         <p:spPr>
           <a:xfrm>
-            <a:off x="1390650" y="5238750"/>
+            <a:off x="1390650" y="4810125"/>
             <a:ext cx="533400" cy="323850"/>
           </a:xfrm>
           <a:prstGeom prst="rect">
@@ -4205,8 +4205,8 @@
         </p:nvSpPr>
         <p:spPr>
           <a:xfrm>
-            <a:off x="2190750" y="4972050"/>
-            <a:ext cx="14573250" cy="819150"/>
+            <a:off x="2190750" y="4581525"/>
+            <a:ext cx="14573250" cy="742950"/>
           </a:xfrm>
           <a:prstGeom prst="rect">
             <a:avLst/>
@@ -4225,7 +4225,7 @@
               </a:lnSpc>
             </a:pPr>
             <a:r>
-              <a:rPr sz="2325" b="1">
+              <a:rPr sz="2100" b="1">
                 <a:solidFill>
                   <a:srgbClr val="0D2B5E"/>
                 </a:solidFill>
@@ -4233,7 +4233,7 @@
                 <a:ea typeface="Pretendard"/>
                 <a:cs typeface="Pretendard"/>
               </a:rPr>
-              <a:t>"orders$snapshots" 의 snapshot_id 가 4-2·4-3 과 같다</a:t>
+              <a:t>"orders$snapshots" 이력이 같고 첫 id 로 네 행이 보인다</a:t>
             </a:r>
           </a:p>
         </p:txBody>
@@ -4246,12 +4246,12 @@
         </p:nvSpPr>
         <p:spPr>
           <a:xfrm>
-            <a:off x="1143000" y="5962650"/>
-            <a:ext cx="16002000" cy="819150"/>
+            <a:off x="1143000" y="5438775"/>
+            <a:ext cx="16002000" cy="742950"/>
           </a:xfrm>
           <a:prstGeom prst="roundRect">
             <a:avLst>
-              <a:gd name="adj" fmla="val 5813"/>
+              <a:gd name="adj" fmla="val 6410"/>
             </a:avLst>
           </a:prstGeom>
           <a:solidFill>
@@ -4280,7 +4280,7 @@
         </p:nvSpPr>
         <p:spPr>
           <a:xfrm>
-            <a:off x="1390650" y="6105525"/>
+            <a:off x="1390650" y="5543550"/>
             <a:ext cx="533400" cy="533400"/>
           </a:xfrm>
           <a:prstGeom prst="ellipse">
@@ -4310,7 +4310,7 @@
         </p:nvSpPr>
         <p:spPr>
           <a:xfrm>
-            <a:off x="1390650" y="6229350"/>
+            <a:off x="1390650" y="5667375"/>
             <a:ext cx="533400" cy="323850"/>
           </a:xfrm>
           <a:prstGeom prst="rect">
@@ -4351,8 +4351,8 @@
         </p:nvSpPr>
         <p:spPr>
           <a:xfrm>
-            <a:off x="2190750" y="5962650"/>
-            <a:ext cx="14573250" cy="819150"/>
+            <a:off x="2190750" y="5438775"/>
+            <a:ext cx="14573250" cy="742950"/>
           </a:xfrm>
           <a:prstGeom prst="rect">
             <a:avLst/>
@@ -4371,7 +4371,7 @@
               </a:lnSpc>
             </a:pPr>
             <a:r>
-              <a:rPr sz="2325" b="1">
+              <a:rPr sz="2100" b="1">
                 <a:solidFill>
                   <a:srgbClr val="0D2B5E"/>
                 </a:solidFill>
@@ -4379,7 +4379,7 @@
                 <a:ea typeface="Pretendard"/>
                 <a:cs typeface="Pretendard"/>
               </a:rPr>
-              <a:t>INSERT 후 7행, DELETE 후 6행 — Spark 에서도 같다</a:t>
+              <a:t>INSERT 뒤 7·DELETE 뒤 6 — Spark 는 벡터화 읽기 실패 확인</a:t>
             </a:r>
           </a:p>
         </p:txBody>
@@ -4392,12 +4392,12 @@
         </p:nvSpPr>
         <p:spPr>
           <a:xfrm>
-            <a:off x="1143000" y="6953250"/>
-            <a:ext cx="16002000" cy="819150"/>
+            <a:off x="1143000" y="6296025"/>
+            <a:ext cx="16002000" cy="742950"/>
           </a:xfrm>
           <a:prstGeom prst="roundRect">
             <a:avLst>
-              <a:gd name="adj" fmla="val 5813"/>
+              <a:gd name="adj" fmla="val 6410"/>
             </a:avLst>
           </a:prstGeom>
           <a:solidFill>
@@ -4426,7 +4426,7 @@
         </p:nvSpPr>
         <p:spPr>
           <a:xfrm>
-            <a:off x="1390650" y="7096125"/>
+            <a:off x="1390650" y="6400800"/>
             <a:ext cx="533400" cy="533400"/>
           </a:xfrm>
           <a:prstGeom prst="ellipse">
@@ -4456,7 +4456,7 @@
         </p:nvSpPr>
         <p:spPr>
           <a:xfrm>
-            <a:off x="1390650" y="7219950"/>
+            <a:off x="1390650" y="6524625"/>
             <a:ext cx="533400" cy="323850"/>
           </a:xfrm>
           <a:prstGeom prst="rect">
@@ -4497,8 +4497,8 @@
         </p:nvSpPr>
         <p:spPr>
           <a:xfrm>
-            <a:off x="2190750" y="6953250"/>
-            <a:ext cx="14573250" cy="819150"/>
+            <a:off x="2190750" y="6296025"/>
+            <a:ext cx="14573250" cy="742950"/>
           </a:xfrm>
           <a:prstGeom prst="rect">
             <a:avLst/>
@@ -4517,7 +4517,7 @@
               </a:lnSpc>
             </a:pPr>
             <a:r>
-              <a:rPr sz="2325" b="1">
+              <a:rPr sz="2100" b="1">
                 <a:solidFill>
                   <a:srgbClr val="0D2B5E"/>
                 </a:solidFill>
@@ -4525,14 +4525,160 @@
                 <a:ea typeface="Pretendard"/>
                 <a:cs typeface="Pretendard"/>
               </a:rPr>
-              <a:t>채널별 비중의 합이 100 에 가깝다</a:t>
-            </a:r>
-          </a:p>
-        </p:txBody>
-      </p:sp>
-      <p:sp>
-        <p:nvSpPr>
-          <p:cNvPr id="28" name="Rectangle 27"/>
+              <a:t>속성을 끈 뒤 Spark SELECT * 가 여섯 행을 낸다</a:t>
+            </a:r>
+          </a:p>
+        </p:txBody>
+      </p:sp>
+      <p:sp>
+        <p:nvSpPr>
+          <p:cNvPr id="28" name="Rounded Rectangle 27"/>
+          <p:cNvSpPr/>
+          <p:nvPr/>
+        </p:nvSpPr>
+        <p:spPr>
+          <a:xfrm>
+            <a:off x="1143000" y="7153275"/>
+            <a:ext cx="16002000" cy="742950"/>
+          </a:xfrm>
+          <a:prstGeom prst="roundRect">
+            <a:avLst>
+              <a:gd name="adj" fmla="val 6410"/>
+            </a:avLst>
+          </a:prstGeom>
+          <a:solidFill>
+            <a:srgbClr val="FAFBFD"/>
+          </a:solidFill>
+          <a:ln w="9525">
+            <a:solidFill>
+              <a:srgbClr val="DCE1E8"/>
+            </a:solidFill>
+          </a:ln>
+          <a:effectLst/>
+        </p:spPr>
+        <p:txBody>
+          <a:bodyPr rtlCol="0" anchor="ctr" wrap="square"/>
+          <a:lstStyle/>
+          <a:p>
+            <a:pPr algn="ctr"/>
+          </a:p>
+        </p:txBody>
+      </p:sp>
+      <p:sp>
+        <p:nvSpPr>
+          <p:cNvPr id="29" name="Oval 28"/>
+          <p:cNvSpPr/>
+          <p:nvPr/>
+        </p:nvSpPr>
+        <p:spPr>
+          <a:xfrm>
+            <a:off x="1390650" y="7258050"/>
+            <a:ext cx="533400" cy="533400"/>
+          </a:xfrm>
+          <a:prstGeom prst="ellipse">
+            <a:avLst/>
+          </a:prstGeom>
+          <a:solidFill>
+            <a:srgbClr val="0D2B5E"/>
+          </a:solidFill>
+          <a:ln>
+            <a:noFill/>
+          </a:ln>
+          <a:effectLst/>
+        </p:spPr>
+        <p:txBody>
+          <a:bodyPr rtlCol="0" anchor="ctr" wrap="square"/>
+          <a:lstStyle/>
+          <a:p>
+            <a:pPr algn="ctr"/>
+          </a:p>
+        </p:txBody>
+      </p:sp>
+      <p:sp>
+        <p:nvSpPr>
+          <p:cNvPr id="30" name="TextBox 29"/>
+          <p:cNvSpPr txBox="1"/>
+          <p:nvPr/>
+        </p:nvSpPr>
+        <p:spPr>
+          <a:xfrm>
+            <a:off x="1390650" y="7381875"/>
+            <a:ext cx="533400" cy="323850"/>
+          </a:xfrm>
+          <a:prstGeom prst="rect">
+            <a:avLst/>
+          </a:prstGeom>
+          <a:noFill/>
+        </p:spPr>
+        <p:txBody>
+          <a:bodyPr wrap="square" lIns="0" rIns="0" tIns="0" bIns="0" anchor="t">
+            <a:spAutoFit/>
+          </a:bodyPr>
+          <a:lstStyle/>
+          <a:p>
+            <a:pPr algn="ctr">
+              <a:lnSpc>
+                <a:spcPct val="100000"/>
+              </a:lnSpc>
+            </a:pPr>
+            <a:r>
+              <a:rPr sz="2100" b="1">
+                <a:solidFill>
+                  <a:srgbClr val="FFFFFF"/>
+                </a:solidFill>
+                <a:latin typeface="Pretendard"/>
+                <a:ea typeface="Pretendard"/>
+                <a:cs typeface="Pretendard"/>
+              </a:rPr>
+              <a:t>6</a:t>
+            </a:r>
+          </a:p>
+        </p:txBody>
+      </p:sp>
+      <p:sp>
+        <p:nvSpPr>
+          <p:cNvPr id="31" name="TextBox 30"/>
+          <p:cNvSpPr txBox="1"/>
+          <p:nvPr/>
+        </p:nvSpPr>
+        <p:spPr>
+          <a:xfrm>
+            <a:off x="2190750" y="7153275"/>
+            <a:ext cx="14573250" cy="742950"/>
+          </a:xfrm>
+          <a:prstGeom prst="rect">
+            <a:avLst/>
+          </a:prstGeom>
+          <a:noFill/>
+        </p:spPr>
+        <p:txBody>
+          <a:bodyPr wrap="square" lIns="0" rIns="0" tIns="0" bIns="0" anchor="ctr">
+            <a:spAutoFit/>
+          </a:bodyPr>
+          <a:lstStyle/>
+          <a:p>
+            <a:pPr algn="l">
+              <a:lnSpc>
+                <a:spcPct val="100000"/>
+              </a:lnSpc>
+            </a:pPr>
+            <a:r>
+              <a:rPr sz="2100" b="1">
+                <a:solidFill>
+                  <a:srgbClr val="0D2B5E"/>
+                </a:solidFill>
+                <a:latin typeface="Pretendard"/>
+                <a:ea typeface="Pretendard"/>
+                <a:cs typeface="Pretendard"/>
+              </a:rPr>
+              <a:t>채널별 비중 app 55.2 · web 44.8 — 합이 100</a:t>
+            </a:r>
+          </a:p>
+        </p:txBody>
+      </p:sp>
+      <p:sp>
+        <p:nvSpPr>
+          <p:cNvPr id="32" name="Rectangle 31"/>
           <p:cNvSpPr/>
           <p:nvPr/>
         </p:nvSpPr>
@@ -4562,7 +4708,7 @@
       </p:sp>
       <p:sp>
         <p:nvSpPr>
-          <p:cNvPr id="29" name="TextBox 28"/>
+          <p:cNvPr id="33" name="TextBox 32"/>
           <p:cNvSpPr txBox="1"/>
           <p:nvPr/>
         </p:nvSpPr>
@@ -4603,7 +4749,7 @@
       </p:sp>
       <p:sp>
         <p:nvSpPr>
-          <p:cNvPr id="30" name="TextBox 29"/>
+          <p:cNvPr id="34" name="TextBox 33"/>
           <p:cNvSpPr txBox="1"/>
           <p:nvPr/>
         </p:nvSpPr>
@@ -4662,7 +4808,7 @@
       <p:grpSpPr/>
       <p:sp>
         <p:nvSpPr>
-          <p:cNvPr id="2" name="Oval 1"/>
+          <p:cNvPr id="2" name="deckgen:decor"/>
           <p:cNvSpPr/>
           <p:nvPr/>
         </p:nvSpPr>
@@ -4692,7 +4838,7 @@
       </p:sp>
       <p:sp>
         <p:nvSpPr>
-          <p:cNvPr id="3" name="Oval 2"/>
+          <p:cNvPr id="3" name="deckgen:decor"/>
           <p:cNvSpPr/>
           <p:nvPr/>
         </p:nvSpPr>
@@ -5469,7 +5615,7 @@
       <p:grpSpPr/>
       <p:sp>
         <p:nvSpPr>
-          <p:cNvPr id="2" name="Oval 1"/>
+          <p:cNvPr id="2" name="deckgen:decor"/>
           <p:cNvSpPr/>
           <p:nvPr/>
         </p:nvSpPr>
@@ -5499,7 +5645,7 @@
       </p:sp>
       <p:sp>
         <p:nvSpPr>
-          <p:cNvPr id="3" name="Oval 2"/>
+          <p:cNvPr id="3" name="deckgen:decor"/>
           <p:cNvSpPr/>
           <p:nvPr/>
         </p:nvSpPr>
@@ -5529,7 +5675,7 @@
       </p:sp>
       <p:sp>
         <p:nvSpPr>
-          <p:cNvPr id="4" name="Oval 3"/>
+          <p:cNvPr id="4" name="deckgen:decor"/>
           <p:cNvSpPr/>
           <p:nvPr/>
         </p:nvSpPr>
@@ -6248,7 +6394,7 @@
                 <a:ea typeface="Pretendard"/>
                 <a:cs typeface="Pretendard"/>
               </a:rPr>
-              <a:t>EXPLAIN·웹 UI 로 실행 계획을 보고, INSERT·DELETE 를 해 본다</a:t>
+              <a:t>EXPLAIN·웹 UI 를 보고, Trino 가 쓴 파일을 Spark 로 읽어 본다</a:t>
             </a:r>
           </a:p>
         </p:txBody>
@@ -6460,7 +6606,7 @@
       <p:grpSpPr/>
       <p:sp>
         <p:nvSpPr>
-          <p:cNvPr id="2" name="Oval 1"/>
+          <p:cNvPr id="2" name="deckgen:decor"/>
           <p:cNvSpPr/>
           <p:nvPr/>
         </p:nvSpPr>
@@ -6490,7 +6636,7 @@
       </p:sp>
       <p:sp>
         <p:nvSpPr>
-          <p:cNvPr id="3" name="Oval 2"/>
+          <p:cNvPr id="3" name="deckgen:decor"/>
           <p:cNvSpPr/>
           <p:nvPr/>
         </p:nvSpPr>
@@ -6520,7 +6666,7 @@
       </p:sp>
       <p:sp>
         <p:nvSpPr>
-          <p:cNvPr id="4" name="Oval 3"/>
+          <p:cNvPr id="4" name="deckgen:decor"/>
           <p:cNvSpPr/>
           <p:nvPr/>
         </p:nvSpPr>
@@ -7498,7 +7644,7 @@
                 <a:ea typeface="Pretendard"/>
                 <a:cs typeface="Pretendard"/>
               </a:rPr>
-              <a:t>INSERT·DELETE</a:t>
+              <a:t>Spark 로 읽기</a:t>
             </a:r>
           </a:p>
           <a:p>
@@ -7653,7 +7799,7 @@
       <p:grpSpPr/>
       <p:sp>
         <p:nvSpPr>
-          <p:cNvPr id="2" name="Oval 1"/>
+          <p:cNvPr id="2" name="deckgen:decor"/>
           <p:cNvSpPr/>
           <p:nvPr/>
         </p:nvSpPr>
@@ -7683,7 +7829,7 @@
       </p:sp>
       <p:sp>
         <p:nvSpPr>
-          <p:cNvPr id="3" name="Oval 2"/>
+          <p:cNvPr id="3" name="deckgen:decor"/>
           <p:cNvSpPr/>
           <p:nvPr/>
         </p:nvSpPr>
@@ -7713,7 +7859,7 @@
       </p:sp>
       <p:sp>
         <p:nvSpPr>
-          <p:cNvPr id="4" name="Oval 3"/>
+          <p:cNvPr id="4" name="deckgen:decor"/>
           <p:cNvSpPr/>
           <p:nvPr/>
         </p:nvSpPr>
@@ -8035,7 +8181,7 @@
                 <a:ea typeface="Pretendard"/>
                 <a:cs typeface="Pretendard"/>
               </a:rPr>
-              <a:t>count(*) AS orders, sum(amount) AS total — GROUP BY customer</a:t>
+              <a:t>GROUP BY customer → 6행, choi 61000.0 이 맨 위</a:t>
             </a:r>
           </a:p>
         </p:txBody>
@@ -8222,7 +8368,7 @@
                 <a:ea typeface="Pretendard"/>
                 <a:cs typeface="Pretendard"/>
               </a:rPr>
-              <a:t>GROUP BY order_date, channel — cnt·revenue</a:t>
+              <a:t>GROUP BY order_date, channel → 5행, 08-03 app 2건 79000.0</a:t>
             </a:r>
           </a:p>
         </p:txBody>
@@ -8409,7 +8555,7 @@
                 <a:ea typeface="Pretendard"/>
                 <a:cs typeface="Pretendard"/>
               </a:rPr>
-              <a:t>sum(amount) OVER (ORDER BY order_date, order_id) AS running</a:t>
+              <a:t>sum(amount) OVER (ORDER BY …) → 15000.0 에서 165000.0 까지 6행</a:t>
             </a:r>
           </a:p>
         </p:txBody>
@@ -8751,7 +8897,7 @@
       <p:grpSpPr/>
       <p:sp>
         <p:nvSpPr>
-          <p:cNvPr id="2" name="Oval 1"/>
+          <p:cNvPr id="2" name="deckgen:decor"/>
           <p:cNvSpPr/>
           <p:nvPr/>
         </p:nvSpPr>
@@ -8781,7 +8927,7 @@
       </p:sp>
       <p:sp>
         <p:nvSpPr>
-          <p:cNvPr id="3" name="Oval 2"/>
+          <p:cNvPr id="3" name="deckgen:decor"/>
           <p:cNvSpPr/>
           <p:nvPr/>
         </p:nvSpPr>
@@ -8811,7 +8957,7 @@
       </p:sp>
       <p:sp>
         <p:nvSpPr>
-          <p:cNvPr id="4" name="Oval 3"/>
+          <p:cNvPr id="4" name="deckgen:decor"/>
           <p:cNvSpPr/>
           <p:nvPr/>
         </p:nvSpPr>
@@ -9133,7 +9279,7 @@
                 <a:ea typeface="Pretendard"/>
                 <a:cs typeface="Pretendard"/>
               </a:rPr>
-              <a:t>iceberg.lakehouse.daily_sales — order_date 별 order_cnt·revenue</a:t>
+              <a:t>daily_sales — order_date 별 order_cnt·revenue → 3 rows</a:t>
             </a:r>
           </a:p>
         </p:txBody>
@@ -9320,7 +9466,7 @@
                 <a:ea typeface="Pretendard"/>
                 <a:cs typeface="Pretendard"/>
               </a:rPr>
-              <a:t>SELECT * FROM iceberg.lakehouse.daily_sales ORDER BY order_date</a:t>
+              <a:t>08-01 1 15000.0 · 08-02 2 47000.0 · 08-03 3 103000.0</a:t>
             </a:r>
           </a:p>
         </p:txBody>
@@ -9507,7 +9653,7 @@
                 <a:ea typeface="Pretendard"/>
                 <a:cs typeface="Pretendard"/>
               </a:rPr>
-              <a:t>spark-sql -e "SELECT * FROM demo.lakehouse.daily_sales …"</a:t>
+              <a:t>두 번째 터미널 셸에서 cd ~/lakehouse → spark-sql — 같은 세 줄</a:t>
             </a:r>
           </a:p>
         </p:txBody>
@@ -9694,7 +9840,7 @@
                 <a:ea typeface="Pretendard"/>
                 <a:cs typeface="Pretendard"/>
               </a:rPr>
-              <a:t>mc ls --recursive local/warehouse | grep daily_sales</a:t>
+              <a:t>lakehouse/daily_sales-&lt;고유 문자열&gt;/ 아래 data·metadata</a:t>
             </a:r>
           </a:p>
         </p:txBody>
@@ -9810,7 +9956,7 @@
                 <a:ea typeface="Pretendard"/>
                 <a:cs typeface="Pretendard"/>
               </a:rPr>
-              <a:t>양쪽 같은 집계</a:t>
+              <a:t>양쪽 같은 세 줄</a:t>
             </a:r>
           </a:p>
           <a:p>
@@ -9965,7 +10111,7 @@
       <p:grpSpPr/>
       <p:sp>
         <p:nvSpPr>
-          <p:cNvPr id="2" name="Oval 1"/>
+          <p:cNvPr id="2" name="deckgen:decor"/>
           <p:cNvSpPr/>
           <p:nvPr/>
         </p:nvSpPr>
@@ -9995,7 +10141,7 @@
       </p:sp>
       <p:sp>
         <p:nvSpPr>
-          <p:cNvPr id="3" name="Oval 2"/>
+          <p:cNvPr id="3" name="deckgen:decor"/>
           <p:cNvSpPr/>
           <p:nvPr/>
         </p:nvSpPr>
@@ -10025,7 +10171,7 @@
       </p:sp>
       <p:sp>
         <p:nvSpPr>
-          <p:cNvPr id="4" name="Oval 3"/>
+          <p:cNvPr id="4" name="deckgen:decor"/>
           <p:cNvSpPr/>
           <p:nvPr/>
         </p:nvSpPr>
@@ -11557,7 +11703,7 @@
                 <a:ea typeface="Pretendard"/>
                 <a:cs typeface="Pretendard"/>
               </a:rPr>
-              <a:t>SELECT committed_at, snapshot_id, operation FROM iceberg.lakehouse."orders$snapshots" — 4-2·4-3 의 snapshot_id 와 같은 값</a:t>
+              <a:t>첫 snapshot_id 로 FOR VERSION AS OF → 4-2 직후 네 행 · 숫자를 안 바꾸면 Iceberg snapshot ID does not exists</a:t>
             </a:r>
           </a:p>
         </p:txBody>
@@ -11598,7 +11744,7 @@
                 <a:ea typeface="Pretendard"/>
                 <a:cs typeface="Pretendard"/>
               </a:rPr>
-              <a:t>$ 는 식별자에 못 들어가므로 메타테이블 이름에 큰따옴표가 필요하다 — 빼면 문법 오류</a:t>
+              <a:t>따옴표 없이 orders$snapshots 를 치면 mismatched input '$' — 일부러 한 번 쳐 보세요</a:t>
             </a:r>
           </a:p>
         </p:txBody>
@@ -11735,7 +11881,7 @@
       <p:grpSpPr/>
       <p:sp>
         <p:nvSpPr>
-          <p:cNvPr id="2" name="Oval 1"/>
+          <p:cNvPr id="2" name="deckgen:decor"/>
           <p:cNvSpPr/>
           <p:nvPr/>
         </p:nvSpPr>
@@ -11765,7 +11911,7 @@
       </p:sp>
       <p:sp>
         <p:nvSpPr>
-          <p:cNvPr id="3" name="Oval 2"/>
+          <p:cNvPr id="3" name="deckgen:decor"/>
           <p:cNvSpPr/>
           <p:nvPr/>
         </p:nvSpPr>
@@ -11795,7 +11941,7 @@
       </p:sp>
       <p:sp>
         <p:nvSpPr>
-          <p:cNvPr id="4" name="Oval 3"/>
+          <p:cNvPr id="4" name="deckgen:decor"/>
           <p:cNvSpPr/>
           <p:nvPr/>
         </p:nvSpPr>
@@ -12106,7 +12252,7 @@
                 <a:ea typeface="Pretendard"/>
                 <a:cs typeface="Pretendard"/>
               </a:rPr>
-              <a:t>EXPLAIN SELECT customer, sum(amount) …</a:t>
+              <a:t>Fragment 1 [SOURCE] — 아래 조각</a:t>
             </a:r>
           </a:p>
           <a:p>
@@ -12127,7 +12273,7 @@
                 <a:ea typeface="Pretendard"/>
                 <a:cs typeface="Pretendard"/>
               </a:rPr>
-              <a:t>ScanProject · Aggregate · Output 같은 단계가 보인다</a:t>
+              <a:t>TableScan 으로 읽고 Aggregate(PARTIAL)로 미리 합친다</a:t>
             </a:r>
           </a:p>
         </p:txBody>
@@ -12303,7 +12449,7 @@
                 <a:ea typeface="Pretendard"/>
                 <a:cs typeface="Pretendard"/>
               </a:rPr>
-              <a:t>http://localhost:8080</a:t>
+              <a:t>Fragment 0 [HASH] — 위 조각</a:t>
             </a:r>
           </a:p>
           <a:p>
@@ -12324,7 +12470,7 @@
                 <a:ea typeface="Pretendard"/>
                 <a:cs typeface="Pretendard"/>
               </a:rPr>
-              <a:t>방금 실행한 쿼리를 클릭하면 각 단계가 몇 행을 처리했는지 보인다</a:t>
+              <a:t>RemoteSource · LocalExchange → Aggregate(FINAL) → Output</a:t>
             </a:r>
           </a:p>
         </p:txBody>
@@ -12500,7 +12646,7 @@
                 <a:ea typeface="Pretendard"/>
                 <a:cs typeface="Pretendard"/>
               </a:rPr>
-              <a:t>느린 쿼리를 만나면</a:t>
+              <a:t>http://localhost:8080 (/ui/)</a:t>
             </a:r>
           </a:p>
           <a:p>
@@ -12521,7 +12667,7 @@
                 <a:ea typeface="Pretendard"/>
                 <a:cs typeface="Pretendard"/>
               </a:rPr>
-              <a:t>어느 단계가 오래 걸렸는지 여기서 찾는다</a:t>
+              <a:t>이름은 아무 값으로 로그인 — 쿼리를 클릭하면 단계별 처리 행 수</a:t>
             </a:r>
           </a:p>
         </p:txBody>
@@ -12697,7 +12843,7 @@
                 <a:ea typeface="Pretendard"/>
                 <a:cs typeface="Pretendard"/>
               </a:rPr>
-              <a:t>5주차 Spark UI</a:t>
+              <a:t>느린 쿼리를 만나면</a:t>
             </a:r>
           </a:p>
           <a:p>
@@ -12718,7 +12864,7 @@
                 <a:ea typeface="Pretendard"/>
                 <a:cs typeface="Pretendard"/>
               </a:rPr>
-              <a:t>비슷한 화면을 제공한다</a:t>
+              <a:t>어느 단계가 오래 걸렸는지 여기서 — 5주차 Spark UI 도 비슷</a:t>
             </a:r>
           </a:p>
         </p:txBody>
@@ -12855,7 +13001,7 @@
       <p:grpSpPr/>
       <p:sp>
         <p:nvSpPr>
-          <p:cNvPr id="2" name="Oval 1"/>
+          <p:cNvPr id="2" name="deckgen:decor"/>
           <p:cNvSpPr/>
           <p:nvPr/>
         </p:nvSpPr>
@@ -12885,7 +13031,7 @@
       </p:sp>
       <p:sp>
         <p:nvSpPr>
-          <p:cNvPr id="3" name="Oval 2"/>
+          <p:cNvPr id="3" name="deckgen:decor"/>
           <p:cNvSpPr/>
           <p:nvPr/>
         </p:nvSpPr>
@@ -12915,7 +13061,7 @@
       </p:sp>
       <p:sp>
         <p:nvSpPr>
-          <p:cNvPr id="4" name="Oval 3"/>
+          <p:cNvPr id="4" name="deckgen:decor"/>
           <p:cNvSpPr/>
           <p:nvPr/>
         </p:nvSpPr>
@@ -12979,7 +13125,7 @@
                 <a:ea typeface="Pretendard"/>
                 <a:cs typeface="Pretendard"/>
               </a:rPr>
-              <a:t>일부러 실패시키기</a:t>
+              <a:t>5단계 · 일부러 실패시키기</a:t>
             </a:r>
           </a:p>
         </p:txBody>
@@ -13020,7 +13166,7 @@
                 <a:ea typeface="Pretendard"/>
                 <a:cs typeface="Pretendard"/>
               </a:rPr>
-              <a:t>큰따옴표 없이 orders$snapshots 를 불러 보기</a:t>
+              <a:t>Trino 로 쓴 표를 Spark 가 읽을 수 있을까</a:t>
             </a:r>
           </a:p>
         </p:txBody>
@@ -13057,59 +13203,18 @@
       </p:sp>
       <p:sp>
         <p:nvSpPr>
-          <p:cNvPr id="8" name="TextBox 7"/>
-          <p:cNvSpPr txBox="1"/>
-          <p:nvPr/>
-        </p:nvSpPr>
-        <p:spPr>
-          <a:xfrm>
-            <a:off x="1143000" y="3067050"/>
-            <a:ext cx="16002000" cy="438150"/>
-          </a:xfrm>
-          <a:prstGeom prst="rect">
-            <a:avLst/>
-          </a:prstGeom>
-          <a:noFill/>
-        </p:spPr>
-        <p:txBody>
-          <a:bodyPr wrap="square" lIns="0" rIns="0" tIns="0" bIns="0" anchor="t">
-            <a:spAutoFit/>
-          </a:bodyPr>
-          <a:lstStyle/>
-          <a:p>
-            <a:pPr algn="l">
-              <a:lnSpc>
-                <a:spcPct val="130000"/>
-              </a:lnSpc>
-            </a:pPr>
-            <a:r>
-              <a:rPr sz="2550" b="1">
-                <a:solidFill>
-                  <a:srgbClr val="3D3D3D"/>
-                </a:solidFill>
-                <a:latin typeface="Pretendard"/>
-                <a:ea typeface="Pretendard"/>
-                <a:cs typeface="Pretendard"/>
-              </a:rPr>
-              <a:t>Trino 에서 $ 가 식별자에 못 들어간다는 것을 오류 메시지로 확인합니다</a:t>
-            </a:r>
-          </a:p>
-        </p:txBody>
-      </p:sp>
-      <p:sp>
-        <p:nvSpPr>
-          <p:cNvPr id="9" name="Rounded Rectangle 8"/>
-          <p:cNvSpPr/>
-          <p:nvPr/>
-        </p:nvSpPr>
-        <p:spPr>
-          <a:xfrm>
-            <a:off x="1143000" y="3924300"/>
-            <a:ext cx="2895600" cy="3143250"/>
+          <p:cNvPr id="8" name="Rounded Rectangle 7"/>
+          <p:cNvSpPr/>
+          <p:nvPr/>
+        </p:nvSpPr>
+        <p:spPr>
+          <a:xfrm>
+            <a:off x="1143000" y="2933700"/>
+            <a:ext cx="16002000" cy="1000125"/>
           </a:xfrm>
           <a:prstGeom prst="roundRect">
             <a:avLst>
-              <a:gd name="adj" fmla="val 1644"/>
+              <a:gd name="adj" fmla="val 4761"/>
             </a:avLst>
           </a:prstGeom>
           <a:solidFill>
@@ -13132,16 +13237,16 @@
       </p:sp>
       <p:sp>
         <p:nvSpPr>
-          <p:cNvPr id="10" name="Rectangle 9"/>
-          <p:cNvSpPr/>
-          <p:nvPr/>
-        </p:nvSpPr>
-        <p:spPr>
-          <a:xfrm>
-            <a:off x="1143000" y="3924300"/>
-            <a:ext cx="2895600" cy="914400"/>
-          </a:xfrm>
-          <a:prstGeom prst="rect">
+          <p:cNvPr id="9" name="Oval 8"/>
+          <p:cNvSpPr/>
+          <p:nvPr/>
+        </p:nvSpPr>
+        <p:spPr>
+          <a:xfrm>
+            <a:off x="1447800" y="3138488"/>
+            <a:ext cx="590550" cy="590550"/>
+          </a:xfrm>
+          <a:prstGeom prst="ellipse">
             <a:avLst/>
           </a:prstGeom>
           <a:solidFill>
@@ -13162,14 +13267,55 @@
       </p:sp>
       <p:sp>
         <p:nvSpPr>
+          <p:cNvPr id="10" name="TextBox 9"/>
+          <p:cNvSpPr txBox="1"/>
+          <p:nvPr/>
+        </p:nvSpPr>
+        <p:spPr>
+          <a:xfrm>
+            <a:off x="1447800" y="3290888"/>
+            <a:ext cx="590550" cy="323850"/>
+          </a:xfrm>
+          <a:prstGeom prst="rect">
+            <a:avLst/>
+          </a:prstGeom>
+          <a:noFill/>
+        </p:spPr>
+        <p:txBody>
+          <a:bodyPr wrap="square" lIns="0" rIns="0" tIns="0" bIns="0" anchor="t">
+            <a:spAutoFit/>
+          </a:bodyPr>
+          <a:lstStyle/>
+          <a:p>
+            <a:pPr algn="ctr">
+              <a:lnSpc>
+                <a:spcPct val="100000"/>
+              </a:lnSpc>
+            </a:pPr>
+            <a:r>
+              <a:rPr sz="2250" b="1">
+                <a:solidFill>
+                  <a:srgbClr val="FFFFFF"/>
+                </a:solidFill>
+                <a:latin typeface="Pretendard"/>
+                <a:ea typeface="Pretendard"/>
+                <a:cs typeface="Pretendard"/>
+              </a:rPr>
+              <a:t>1</a:t>
+            </a:r>
+          </a:p>
+        </p:txBody>
+      </p:sp>
+      <p:sp>
+        <p:nvSpPr>
           <p:cNvPr id="11" name="TextBox 10"/>
           <p:cNvSpPr txBox="1"/>
           <p:nvPr/>
         </p:nvSpPr>
         <p:spPr>
           <a:xfrm>
-            <a:off x="1143000" y="4171950"/>
-            <a:ext cx="2895600" cy="419100"/>
+            <a:off x="2324100" y="3024188"/>
+            <a:ext cx="14478000" cy="400050"/>
           </a:xfrm>
           <a:prstGeom prst="rect">
             <a:avLst/>
@@ -13182,21 +13328,21 @@
           </a:bodyPr>
           <a:lstStyle/>
           <a:p>
-            <a:pPr algn="ctr">
-              <a:lnSpc>
-                <a:spcPct val="100000"/>
+            <a:pPr algn="l">
+              <a:lnSpc>
+                <a:spcPct val="110000"/>
               </a:lnSpc>
             </a:pPr>
             <a:r>
               <a:rPr sz="2475" b="1">
                 <a:solidFill>
-                  <a:srgbClr val="FFFFFF"/>
-                </a:solidFill>
-                <a:latin typeface="Pretendard"/>
-                <a:ea typeface="Pretendard"/>
-                <a:cs typeface="Pretendard"/>
-              </a:rPr>
-              <a:t>1. 따옴표 없이</a:t>
+                  <a:srgbClr val="0D2B5E"/>
+                </a:solidFill>
+                <a:latin typeface="Pretendard"/>
+                <a:ea typeface="Pretendard"/>
+                <a:cs typeface="Pretendard"/>
+              </a:rPr>
+              <a:t>Trino 로 INSERT · DELETE</a:t>
             </a:r>
           </a:p>
         </p:txBody>
@@ -13209,8 +13355,8 @@
         </p:nvSpPr>
         <p:spPr>
           <a:xfrm>
-            <a:off x="1352550" y="5143500"/>
-            <a:ext cx="2476500" cy="1524000"/>
+            <a:off x="2324100" y="3481388"/>
+            <a:ext cx="14478000" cy="361950"/>
           </a:xfrm>
           <a:prstGeom prst="rect">
             <a:avLst/>
@@ -13223,13 +13369,13 @@
           </a:bodyPr>
           <a:lstStyle/>
           <a:p>
-            <a:pPr algn="ctr">
-              <a:lnSpc>
-                <a:spcPct val="146000"/>
-              </a:lnSpc>
-            </a:pPr>
-            <a:r>
-              <a:rPr sz="2100" b="0">
+            <a:pPr algn="l">
+              <a:lnSpc>
+                <a:spcPct val="120000"/>
+              </a:lnSpc>
+            </a:pPr>
+            <a:r>
+              <a:rPr sz="2025" b="0">
                 <a:solidFill>
                   <a:srgbClr val="3D3D3D"/>
                 </a:solidFill>
@@ -13237,25 +13383,7 @@
                 <a:ea typeface="Pretendard"/>
                 <a:cs typeface="Pretendard"/>
               </a:rPr>
-              <a:t>…lakehouse.</a:t>
-            </a:r>
-          </a:p>
-          <a:p>
-            <a:pPr algn="ctr">
-              <a:lnSpc>
-                <a:spcPct val="146000"/>
-              </a:lnSpc>
-            </a:pPr>
-            <a:r>
-              <a:rPr sz="2100" b="0">
-                <a:solidFill>
-                  <a:srgbClr val="3D3D3D"/>
-                </a:solidFill>
-                <a:latin typeface="Pretendard"/>
-                <a:ea typeface="Pretendard"/>
-                <a:cs typeface="Pretendard"/>
-              </a:rPr>
-              <a:t>orders$snapshots</a:t>
+              <a:t>order_id 99 추가 → 1 row · 7, 삭제 → 1 row · 6</a:t>
             </a:r>
           </a:p>
         </p:txBody>
@@ -13268,12 +13396,12 @@
         </p:nvSpPr>
         <p:spPr>
           <a:xfrm>
-            <a:off x="4419600" y="3924300"/>
-            <a:ext cx="2895600" cy="3143250"/>
+            <a:off x="1143000" y="4105275"/>
+            <a:ext cx="16002000" cy="1000125"/>
           </a:xfrm>
           <a:prstGeom prst="roundRect">
             <a:avLst>
-              <a:gd name="adj" fmla="val 1644"/>
+              <a:gd name="adj" fmla="val 4761"/>
             </a:avLst>
           </a:prstGeom>
           <a:solidFill>
@@ -13296,20 +13424,20 @@
       </p:sp>
       <p:sp>
         <p:nvSpPr>
-          <p:cNvPr id="14" name="Rectangle 13"/>
-          <p:cNvSpPr/>
-          <p:nvPr/>
-        </p:nvSpPr>
-        <p:spPr>
-          <a:xfrm>
-            <a:off x="4419600" y="3924300"/>
-            <a:ext cx="2895600" cy="914400"/>
-          </a:xfrm>
-          <a:prstGeom prst="rect">
-            <a:avLst/>
-          </a:prstGeom>
-          <a:solidFill>
-            <a:srgbClr val="1E5BC6"/>
+          <p:cNvPr id="14" name="Oval 13"/>
+          <p:cNvSpPr/>
+          <p:nvPr/>
+        </p:nvSpPr>
+        <p:spPr>
+          <a:xfrm>
+            <a:off x="1447800" y="4310062"/>
+            <a:ext cx="590550" cy="590550"/>
+          </a:xfrm>
+          <a:prstGeom prst="ellipse">
+            <a:avLst/>
+          </a:prstGeom>
+          <a:solidFill>
+            <a:srgbClr val="0D2B5E"/>
           </a:solidFill>
           <a:ln>
             <a:noFill/>
@@ -13332,8 +13460,8 @@
         </p:nvSpPr>
         <p:spPr>
           <a:xfrm>
-            <a:off x="4419600" y="4171950"/>
-            <a:ext cx="2895600" cy="419100"/>
+            <a:off x="1447800" y="4462462"/>
+            <a:ext cx="590550" cy="323850"/>
           </a:xfrm>
           <a:prstGeom prst="rect">
             <a:avLst/>
@@ -13352,29 +13480,70 @@
               </a:lnSpc>
             </a:pPr>
             <a:r>
+              <a:rPr sz="2250" b="1">
+                <a:solidFill>
+                  <a:srgbClr val="FFFFFF"/>
+                </a:solidFill>
+                <a:latin typeface="Pretendard"/>
+                <a:ea typeface="Pretendard"/>
+                <a:cs typeface="Pretendard"/>
+              </a:rPr>
+              <a:t>2</a:t>
+            </a:r>
+          </a:p>
+        </p:txBody>
+      </p:sp>
+      <p:sp>
+        <p:nvSpPr>
+          <p:cNvPr id="16" name="TextBox 15"/>
+          <p:cNvSpPr txBox="1"/>
+          <p:nvPr/>
+        </p:nvSpPr>
+        <p:spPr>
+          <a:xfrm>
+            <a:off x="2324100" y="4195762"/>
+            <a:ext cx="14478000" cy="400050"/>
+          </a:xfrm>
+          <a:prstGeom prst="rect">
+            <a:avLst/>
+          </a:prstGeom>
+          <a:noFill/>
+        </p:spPr>
+        <p:txBody>
+          <a:bodyPr wrap="square" lIns="0" rIns="0" tIns="0" bIns="0" anchor="t">
+            <a:spAutoFit/>
+          </a:bodyPr>
+          <a:lstStyle/>
+          <a:p>
+            <a:pPr algn="l">
+              <a:lnSpc>
+                <a:spcPct val="110000"/>
+              </a:lnSpc>
+            </a:pPr>
+            <a:r>
               <a:rPr sz="2475" b="1">
                 <a:solidFill>
-                  <a:srgbClr val="FFFFFF"/>
-                </a:solidFill>
-                <a:latin typeface="Pretendard"/>
-                <a:ea typeface="Pretendard"/>
-                <a:cs typeface="Pretendard"/>
-              </a:rPr>
-              <a:t>2. 오류 읽기</a:t>
-            </a:r>
-          </a:p>
-        </p:txBody>
-      </p:sp>
-      <p:sp>
-        <p:nvSpPr>
-          <p:cNvPr id="16" name="TextBox 15"/>
-          <p:cNvSpPr txBox="1"/>
-          <p:nvPr/>
-        </p:nvSpPr>
-        <p:spPr>
-          <a:xfrm>
-            <a:off x="4629150" y="5143500"/>
-            <a:ext cx="2476500" cy="1524000"/>
+                  <a:srgbClr val="0D2B5E"/>
+                </a:solidFill>
+                <a:latin typeface="Pretendard"/>
+                <a:ea typeface="Pretendard"/>
+                <a:cs typeface="Pretendard"/>
+              </a:rPr>
+              <a:t>셸에서 Spark SELECT *</a:t>
+            </a:r>
+          </a:p>
+        </p:txBody>
+      </p:sp>
+      <p:sp>
+        <p:nvSpPr>
+          <p:cNvPr id="17" name="TextBox 16"/>
+          <p:cNvSpPr txBox="1"/>
+          <p:nvPr/>
+        </p:nvSpPr>
+        <p:spPr>
+          <a:xfrm>
+            <a:off x="2324100" y="4652962"/>
+            <a:ext cx="14478000" cy="361950"/>
           </a:xfrm>
           <a:prstGeom prst="rect">
             <a:avLst/>
@@ -13387,13 +13556,13 @@
           </a:bodyPr>
           <a:lstStyle/>
           <a:p>
-            <a:pPr algn="ctr">
-              <a:lnSpc>
-                <a:spcPct val="146000"/>
-              </a:lnSpc>
-            </a:pPr>
-            <a:r>
-              <a:rPr sz="2100" b="0">
+            <a:pPr algn="l">
+              <a:lnSpc>
+                <a:spcPct val="120000"/>
+              </a:lnSpc>
+            </a:pPr>
+            <a:r>
+              <a:rPr sz="2025" b="0">
                 <a:solidFill>
                   <a:srgbClr val="3D3D3D"/>
                 </a:solidFill>
@@ -13401,43 +13570,25 @@
                 <a:ea typeface="Pretendard"/>
                 <a:cs typeface="Pretendard"/>
               </a:rPr>
-              <a:t>문법 오류</a:t>
-            </a:r>
-          </a:p>
-          <a:p>
-            <a:pPr algn="ctr">
-              <a:lnSpc>
-                <a:spcPct val="146000"/>
-              </a:lnSpc>
-            </a:pPr>
-            <a:r>
-              <a:rPr sz="2100" b="0">
-                <a:solidFill>
-                  <a:srgbClr val="3D3D3D"/>
-                </a:solidFill>
-                <a:latin typeface="Pretendard"/>
-                <a:ea typeface="Pretendard"/>
-                <a:cs typeface="Pretendard"/>
-              </a:rPr>
-              <a:t>$ 위치</a:t>
-            </a:r>
-          </a:p>
-        </p:txBody>
-      </p:sp>
-      <p:sp>
-        <p:nvSpPr>
-          <p:cNvPr id="17" name="Rounded Rectangle 16"/>
-          <p:cNvSpPr/>
-          <p:nvPr/>
-        </p:nvSpPr>
-        <p:spPr>
-          <a:xfrm>
-            <a:off x="7696200" y="3924300"/>
-            <a:ext cx="2895600" cy="3143250"/>
+              <a:t>Cannot support vectorized reads … DELTA_LENGTH_BYTE_ARRAY</a:t>
+            </a:r>
+          </a:p>
+        </p:txBody>
+      </p:sp>
+      <p:sp>
+        <p:nvSpPr>
+          <p:cNvPr id="18" name="Rounded Rectangle 17"/>
+          <p:cNvSpPr/>
+          <p:nvPr/>
+        </p:nvSpPr>
+        <p:spPr>
+          <a:xfrm>
+            <a:off x="1143000" y="5276850"/>
+            <a:ext cx="16002000" cy="1000125"/>
           </a:xfrm>
           <a:prstGeom prst="roundRect">
             <a:avLst>
-              <a:gd name="adj" fmla="val 1644"/>
+              <a:gd name="adj" fmla="val 4761"/>
             </a:avLst>
           </a:prstGeom>
           <a:solidFill>
@@ -13460,16 +13611,16 @@
       </p:sp>
       <p:sp>
         <p:nvSpPr>
-          <p:cNvPr id="18" name="Rectangle 17"/>
-          <p:cNvSpPr/>
-          <p:nvPr/>
-        </p:nvSpPr>
-        <p:spPr>
-          <a:xfrm>
-            <a:off x="7696200" y="3924300"/>
-            <a:ext cx="2895600" cy="914400"/>
-          </a:xfrm>
-          <a:prstGeom prst="rect">
+          <p:cNvPr id="19" name="Oval 18"/>
+          <p:cNvSpPr/>
+          <p:nvPr/>
+        </p:nvSpPr>
+        <p:spPr>
+          <a:xfrm>
+            <a:off x="1447800" y="5481638"/>
+            <a:ext cx="590550" cy="590550"/>
+          </a:xfrm>
+          <a:prstGeom prst="ellipse">
             <a:avLst/>
           </a:prstGeom>
           <a:solidFill>
@@ -13490,14 +13641,14 @@
       </p:sp>
       <p:sp>
         <p:nvSpPr>
-          <p:cNvPr id="19" name="TextBox 18"/>
-          <p:cNvSpPr txBox="1"/>
-          <p:nvPr/>
-        </p:nvSpPr>
-        <p:spPr>
-          <a:xfrm>
-            <a:off x="7696200" y="4171950"/>
-            <a:ext cx="2895600" cy="419100"/>
+          <p:cNvPr id="20" name="TextBox 19"/>
+          <p:cNvSpPr txBox="1"/>
+          <p:nvPr/>
+        </p:nvSpPr>
+        <p:spPr>
+          <a:xfrm>
+            <a:off x="1447800" y="5634038"/>
+            <a:ext cx="590550" cy="323850"/>
           </a:xfrm>
           <a:prstGeom prst="rect">
             <a:avLst/>
@@ -13516,29 +13667,70 @@
               </a:lnSpc>
             </a:pPr>
             <a:r>
+              <a:rPr sz="2250" b="1">
+                <a:solidFill>
+                  <a:srgbClr val="FFFFFF"/>
+                </a:solidFill>
+                <a:latin typeface="Pretendard"/>
+                <a:ea typeface="Pretendard"/>
+                <a:cs typeface="Pretendard"/>
+              </a:rPr>
+              <a:t>3</a:t>
+            </a:r>
+          </a:p>
+        </p:txBody>
+      </p:sp>
+      <p:sp>
+        <p:nvSpPr>
+          <p:cNvPr id="21" name="TextBox 20"/>
+          <p:cNvSpPr txBox="1"/>
+          <p:nvPr/>
+        </p:nvSpPr>
+        <p:spPr>
+          <a:xfrm>
+            <a:off x="2324100" y="5367338"/>
+            <a:ext cx="14478000" cy="400050"/>
+          </a:xfrm>
+          <a:prstGeom prst="rect">
+            <a:avLst/>
+          </a:prstGeom>
+          <a:noFill/>
+        </p:spPr>
+        <p:txBody>
+          <a:bodyPr wrap="square" lIns="0" rIns="0" tIns="0" bIns="0" anchor="t">
+            <a:spAutoFit/>
+          </a:bodyPr>
+          <a:lstStyle/>
+          <a:p>
+            <a:pPr algn="l">
+              <a:lnSpc>
+                <a:spcPct val="110000"/>
+              </a:lnSpc>
+            </a:pPr>
+            <a:r>
               <a:rPr sz="2475" b="1">
                 <a:solidFill>
-                  <a:srgbClr val="FFFFFF"/>
-                </a:solidFill>
-                <a:latin typeface="Pretendard"/>
-                <a:ea typeface="Pretendard"/>
-                <a:cs typeface="Pretendard"/>
-              </a:rPr>
-              <a:t>3. 큰따옴표로</a:t>
-            </a:r>
-          </a:p>
-        </p:txBody>
-      </p:sp>
-      <p:sp>
-        <p:nvSpPr>
-          <p:cNvPr id="20" name="TextBox 19"/>
-          <p:cNvSpPr txBox="1"/>
-          <p:nvPr/>
-        </p:nvSpPr>
-        <p:spPr>
-          <a:xfrm>
-            <a:off x="7905750" y="5143500"/>
-            <a:ext cx="2476500" cy="1524000"/>
+                  <a:srgbClr val="0D2B5E"/>
+                </a:solidFill>
+                <a:latin typeface="Pretendard"/>
+                <a:ea typeface="Pretendard"/>
+                <a:cs typeface="Pretendard"/>
+              </a:rPr>
+              <a:t>원인</a:t>
+            </a:r>
+          </a:p>
+        </p:txBody>
+      </p:sp>
+      <p:sp>
+        <p:nvSpPr>
+          <p:cNvPr id="22" name="TextBox 21"/>
+          <p:cNvSpPr txBox="1"/>
+          <p:nvPr/>
+        </p:nvSpPr>
+        <p:spPr>
+          <a:xfrm>
+            <a:off x="2324100" y="5824538"/>
+            <a:ext cx="14478000" cy="361950"/>
           </a:xfrm>
           <a:prstGeom prst="rect">
             <a:avLst/>
@@ -13551,13 +13743,13 @@
           </a:bodyPr>
           <a:lstStyle/>
           <a:p>
-            <a:pPr algn="ctr">
-              <a:lnSpc>
-                <a:spcPct val="146000"/>
-              </a:lnSpc>
-            </a:pPr>
-            <a:r>
-              <a:rPr sz="2100" b="0">
+            <a:pPr algn="l">
+              <a:lnSpc>
+                <a:spcPct val="120000"/>
+              </a:lnSpc>
+            </a:pPr>
+            <a:r>
+              <a:rPr sz="2025" b="0">
                 <a:solidFill>
                   <a:srgbClr val="3D3D3D"/>
                 </a:solidFill>
@@ -13565,43 +13757,25 @@
                 <a:ea typeface="Pretendard"/>
                 <a:cs typeface="Pretendard"/>
               </a:rPr>
-              <a:t>"orders$snapshots"</a:t>
-            </a:r>
-          </a:p>
-          <a:p>
-            <a:pPr algn="ctr">
-              <a:lnSpc>
-                <a:spcPct val="146000"/>
-              </a:lnSpc>
-            </a:pPr>
-            <a:r>
-              <a:rPr sz="2100" b="0">
-                <a:solidFill>
-                  <a:srgbClr val="3D3D3D"/>
-                </a:solidFill>
-                <a:latin typeface="Pretendard"/>
-                <a:ea typeface="Pretendard"/>
-                <a:cs typeface="Pretendard"/>
-              </a:rPr>
-              <a:t>다시 실행</a:t>
-            </a:r>
-          </a:p>
-        </p:txBody>
-      </p:sp>
-      <p:sp>
-        <p:nvSpPr>
-          <p:cNvPr id="21" name="Rounded Rectangle 20"/>
-          <p:cNvSpPr/>
-          <p:nvPr/>
-        </p:nvSpPr>
-        <p:spPr>
-          <a:xfrm>
-            <a:off x="10972800" y="3924300"/>
-            <a:ext cx="2895600" cy="3143250"/>
+              <a:t>Trino 483 의 글자 컬럼 형식을 Iceberg 1.8.1 빠른 읽기가 못 읽는다</a:t>
+            </a:r>
+          </a:p>
+        </p:txBody>
+      </p:sp>
+      <p:sp>
+        <p:nvSpPr>
+          <p:cNvPr id="23" name="Rounded Rectangle 22"/>
+          <p:cNvSpPr/>
+          <p:nvPr/>
+        </p:nvSpPr>
+        <p:spPr>
+          <a:xfrm>
+            <a:off x="1143000" y="6448425"/>
+            <a:ext cx="16002000" cy="1000125"/>
           </a:xfrm>
           <a:prstGeom prst="roundRect">
             <a:avLst>
-              <a:gd name="adj" fmla="val 1644"/>
+              <a:gd name="adj" fmla="val 4761"/>
             </a:avLst>
           </a:prstGeom>
           <a:solidFill>
@@ -13624,20 +13798,20 @@
       </p:sp>
       <p:sp>
         <p:nvSpPr>
-          <p:cNvPr id="22" name="Rectangle 21"/>
-          <p:cNvSpPr/>
-          <p:nvPr/>
-        </p:nvSpPr>
-        <p:spPr>
-          <a:xfrm>
-            <a:off x="10972800" y="3924300"/>
-            <a:ext cx="2895600" cy="914400"/>
-          </a:xfrm>
-          <a:prstGeom prst="rect">
-            <a:avLst/>
-          </a:prstGeom>
-          <a:solidFill>
-            <a:srgbClr val="1E5BC6"/>
+          <p:cNvPr id="24" name="Oval 23"/>
+          <p:cNvSpPr/>
+          <p:nvPr/>
+        </p:nvSpPr>
+        <p:spPr>
+          <a:xfrm>
+            <a:off x="1447800" y="6653212"/>
+            <a:ext cx="590550" cy="590550"/>
+          </a:xfrm>
+          <a:prstGeom prst="ellipse">
+            <a:avLst/>
+          </a:prstGeom>
+          <a:solidFill>
+            <a:srgbClr val="0D2B5E"/>
           </a:solidFill>
           <a:ln>
             <a:noFill/>
@@ -13654,14 +13828,14 @@
       </p:sp>
       <p:sp>
         <p:nvSpPr>
-          <p:cNvPr id="23" name="TextBox 22"/>
-          <p:cNvSpPr txBox="1"/>
-          <p:nvPr/>
-        </p:nvSpPr>
-        <p:spPr>
-          <a:xfrm>
-            <a:off x="10972800" y="4171950"/>
-            <a:ext cx="2895600" cy="419100"/>
+          <p:cNvPr id="25" name="TextBox 24"/>
+          <p:cNvSpPr txBox="1"/>
+          <p:nvPr/>
+        </p:nvSpPr>
+        <p:spPr>
+          <a:xfrm>
+            <a:off x="1447800" y="6805612"/>
+            <a:ext cx="590550" cy="323850"/>
           </a:xfrm>
           <a:prstGeom prst="rect">
             <a:avLst/>
@@ -13680,29 +13854,70 @@
               </a:lnSpc>
             </a:pPr>
             <a:r>
+              <a:rPr sz="2250" b="1">
+                <a:solidFill>
+                  <a:srgbClr val="FFFFFF"/>
+                </a:solidFill>
+                <a:latin typeface="Pretendard"/>
+                <a:ea typeface="Pretendard"/>
+                <a:cs typeface="Pretendard"/>
+              </a:rPr>
+              <a:t>4</a:t>
+            </a:r>
+          </a:p>
+        </p:txBody>
+      </p:sp>
+      <p:sp>
+        <p:nvSpPr>
+          <p:cNvPr id="26" name="TextBox 25"/>
+          <p:cNvSpPr txBox="1"/>
+          <p:nvPr/>
+        </p:nvSpPr>
+        <p:spPr>
+          <a:xfrm>
+            <a:off x="2324100" y="6538912"/>
+            <a:ext cx="14478000" cy="400050"/>
+          </a:xfrm>
+          <a:prstGeom prst="rect">
+            <a:avLst/>
+          </a:prstGeom>
+          <a:noFill/>
+        </p:spPr>
+        <p:txBody>
+          <a:bodyPr wrap="square" lIns="0" rIns="0" tIns="0" bIns="0" anchor="t">
+            <a:spAutoFit/>
+          </a:bodyPr>
+          <a:lstStyle/>
+          <a:p>
+            <a:pPr algn="l">
+              <a:lnSpc>
+                <a:spcPct val="110000"/>
+              </a:lnSpc>
+            </a:pPr>
+            <a:r>
               <a:rPr sz="2475" b="1">
                 <a:solidFill>
-                  <a:srgbClr val="FFFFFF"/>
-                </a:solidFill>
-                <a:latin typeface="Pretendard"/>
-                <a:ea typeface="Pretendard"/>
-                <a:cs typeface="Pretendard"/>
-              </a:rPr>
-              <a:t>4. 이력 확인</a:t>
-            </a:r>
-          </a:p>
-        </p:txBody>
-      </p:sp>
-      <p:sp>
-        <p:nvSpPr>
-          <p:cNvPr id="24" name="TextBox 23"/>
-          <p:cNvSpPr txBox="1"/>
-          <p:nvPr/>
-        </p:nvSpPr>
-        <p:spPr>
-          <a:xfrm>
-            <a:off x="11182350" y="5143500"/>
-            <a:ext cx="2476500" cy="1524000"/>
+                  <a:srgbClr val="0D2B5E"/>
+                </a:solidFill>
+                <a:latin typeface="Pretendard"/>
+                <a:ea typeface="Pretendard"/>
+                <a:cs typeface="Pretendard"/>
+              </a:rPr>
+              <a:t>테이블 속성으로 끄기</a:t>
+            </a:r>
+          </a:p>
+        </p:txBody>
+      </p:sp>
+      <p:sp>
+        <p:nvSpPr>
+          <p:cNvPr id="27" name="TextBox 26"/>
+          <p:cNvSpPr txBox="1"/>
+          <p:nvPr/>
+        </p:nvSpPr>
+        <p:spPr>
+          <a:xfrm>
+            <a:off x="2324100" y="6996112"/>
+            <a:ext cx="14478000" cy="361950"/>
           </a:xfrm>
           <a:prstGeom prst="rect">
             <a:avLst/>
@@ -13715,13 +13930,13 @@
           </a:bodyPr>
           <a:lstStyle/>
           <a:p>
-            <a:pPr algn="ctr">
-              <a:lnSpc>
-                <a:spcPct val="146000"/>
-              </a:lnSpc>
-            </a:pPr>
-            <a:r>
-              <a:rPr sz="2100" b="0">
+            <a:pPr algn="l">
+              <a:lnSpc>
+                <a:spcPct val="120000"/>
+              </a:lnSpc>
+            </a:pPr>
+            <a:r>
+              <a:rPr sz="2025" b="0">
                 <a:solidFill>
                   <a:srgbClr val="3D3D3D"/>
                 </a:solidFill>
@@ -13729,79 +13944,27 @@
                 <a:ea typeface="Pretendard"/>
                 <a:cs typeface="Pretendard"/>
               </a:rPr>
-              <a:t>committed_at</a:t>
-            </a:r>
-          </a:p>
-          <a:p>
-            <a:pPr algn="ctr">
-              <a:lnSpc>
-                <a:spcPct val="146000"/>
-              </a:lnSpc>
-            </a:pPr>
-            <a:r>
-              <a:rPr sz="2100" b="0">
-                <a:solidFill>
-                  <a:srgbClr val="3D3D3D"/>
-                </a:solidFill>
-                <a:latin typeface="Pretendard"/>
-                <a:ea typeface="Pretendard"/>
-                <a:cs typeface="Pretendard"/>
-              </a:rPr>
-              <a:t>snapshot_id</a:t>
-            </a:r>
-          </a:p>
-        </p:txBody>
-      </p:sp>
-      <p:sp>
-        <p:nvSpPr>
-          <p:cNvPr id="25" name="Rounded Rectangle 24"/>
-          <p:cNvSpPr/>
-          <p:nvPr/>
-        </p:nvSpPr>
-        <p:spPr>
-          <a:xfrm>
-            <a:off x="14249400" y="3924300"/>
-            <a:ext cx="2895600" cy="3143250"/>
-          </a:xfrm>
-          <a:prstGeom prst="roundRect">
-            <a:avLst>
-              <a:gd name="adj" fmla="val 1644"/>
-            </a:avLst>
-          </a:prstGeom>
-          <a:solidFill>
-            <a:srgbClr val="FAFBFD"/>
-          </a:solidFill>
-          <a:ln w="9525">
-            <a:solidFill>
-              <a:srgbClr val="DCE1E8"/>
-            </a:solidFill>
-          </a:ln>
-          <a:effectLst/>
-        </p:spPr>
-        <p:txBody>
-          <a:bodyPr rtlCol="0" anchor="ctr" wrap="square"/>
-          <a:lstStyle/>
-          <a:p>
-            <a:pPr algn="ctr"/>
-          </a:p>
-        </p:txBody>
-      </p:sp>
-      <p:sp>
-        <p:nvSpPr>
-          <p:cNvPr id="26" name="Rectangle 25"/>
-          <p:cNvSpPr/>
-          <p:nvPr/>
-        </p:nvSpPr>
-        <p:spPr>
-          <a:xfrm>
-            <a:off x="14249400" y="3924300"/>
-            <a:ext cx="2895600" cy="914400"/>
-          </a:xfrm>
-          <a:prstGeom prst="rect">
-            <a:avLst/>
-          </a:prstGeom>
-          <a:solidFill>
-            <a:srgbClr val="0D2B5E"/>
+              <a:t>ALTER TABLE … SET TBLPROPERTIES → SELECT * 여섯 행</a:t>
+            </a:r>
+          </a:p>
+        </p:txBody>
+      </p:sp>
+      <p:sp>
+        <p:nvSpPr>
+          <p:cNvPr id="28" name="Rectangle 27"/>
+          <p:cNvSpPr/>
+          <p:nvPr/>
+        </p:nvSpPr>
+        <p:spPr>
+          <a:xfrm>
+            <a:off x="1143000" y="7581900"/>
+            <a:ext cx="38100" cy="323850"/>
+          </a:xfrm>
+          <a:prstGeom prst="rect">
+            <a:avLst/>
+          </a:prstGeom>
+          <a:solidFill>
+            <a:srgbClr val="BFD3F5"/>
           </a:solidFill>
           <a:ln>
             <a:noFill/>
@@ -13818,14 +13981,14 @@
       </p:sp>
       <p:sp>
         <p:nvSpPr>
-          <p:cNvPr id="27" name="TextBox 26"/>
-          <p:cNvSpPr txBox="1"/>
-          <p:nvPr/>
-        </p:nvSpPr>
-        <p:spPr>
-          <a:xfrm>
-            <a:off x="14249400" y="4171950"/>
-            <a:ext cx="2895600" cy="419100"/>
+          <p:cNvPr id="29" name="TextBox 28"/>
+          <p:cNvSpPr txBox="1"/>
+          <p:nvPr/>
+        </p:nvSpPr>
+        <p:spPr>
+          <a:xfrm>
+            <a:off x="1314450" y="7581900"/>
+            <a:ext cx="15830550" cy="342900"/>
           </a:xfrm>
           <a:prstGeom prst="rect">
             <a:avLst/>
@@ -13838,87 +14001,28 @@
           </a:bodyPr>
           <a:lstStyle/>
           <a:p>
-            <a:pPr algn="ctr">
+            <a:pPr algn="l">
               <a:lnSpc>
                 <a:spcPct val="100000"/>
               </a:lnSpc>
             </a:pPr>
             <a:r>
-              <a:rPr sz="2475" b="1">
-                <a:solidFill>
-                  <a:srgbClr val="FFFFFF"/>
-                </a:solidFill>
-                <a:latin typeface="Pretendard"/>
-                <a:ea typeface="Pretendard"/>
-                <a:cs typeface="Pretendard"/>
-              </a:rPr>
-              <a:t>5. 과거로</a:t>
-            </a:r>
-          </a:p>
-        </p:txBody>
-      </p:sp>
-      <p:sp>
-        <p:nvSpPr>
-          <p:cNvPr id="28" name="TextBox 27"/>
-          <p:cNvSpPr txBox="1"/>
-          <p:nvPr/>
-        </p:nvSpPr>
-        <p:spPr>
-          <a:xfrm>
-            <a:off x="14458950" y="5143500"/>
-            <a:ext cx="2476500" cy="1524000"/>
-          </a:xfrm>
-          <a:prstGeom prst="rect">
-            <a:avLst/>
-          </a:prstGeom>
-          <a:noFill/>
-        </p:spPr>
-        <p:txBody>
-          <a:bodyPr wrap="square" lIns="0" rIns="0" tIns="0" bIns="0" anchor="t">
-            <a:spAutoFit/>
-          </a:bodyPr>
-          <a:lstStyle/>
-          <a:p>
-            <a:pPr algn="ctr">
-              <a:lnSpc>
-                <a:spcPct val="146000"/>
-              </a:lnSpc>
-            </a:pPr>
-            <a:r>
-              <a:rPr sz="2100" b="0">
-                <a:solidFill>
-                  <a:srgbClr val="3D3D3D"/>
-                </a:solidFill>
-                <a:latin typeface="Pretendard"/>
-                <a:ea typeface="Pretendard"/>
-                <a:cs typeface="Pretendard"/>
-              </a:rPr>
-              <a:t>AS OF 조회</a:t>
-            </a:r>
-          </a:p>
-          <a:p>
-            <a:pPr algn="ctr">
-              <a:lnSpc>
-                <a:spcPct val="146000"/>
-              </a:lnSpc>
-            </a:pPr>
-            <a:r>
-              <a:rPr sz="2100" b="0">
-                <a:solidFill>
-                  <a:srgbClr val="3D3D3D"/>
-                </a:solidFill>
-                <a:latin typeface="Pretendard"/>
-                <a:ea typeface="Pretendard"/>
-                <a:cs typeface="Pretendard"/>
-              </a:rPr>
-              <a:t>snapshot_id 복사</a:t>
-            </a:r>
-          </a:p>
-        </p:txBody>
-      </p:sp>
-      <p:sp>
-        <p:nvSpPr>
-          <p:cNvPr id="29" name="Rectangle 28"/>
+              <a:rPr sz="1725" b="1">
+                <a:solidFill>
+                  <a:srgbClr val="7D7D7D"/>
+                </a:solidFill>
+                <a:latin typeface="Pretendard"/>
+                <a:ea typeface="Pretendard"/>
+                <a:cs typeface="Pretendard"/>
+              </a:rPr>
+              <a:t>'read.parquet.vectorization.enabled'='false' — count(*) 는 지나가서 놓치기 쉽다 · 4-5 를 위해 그대로 둔다</a:t>
+            </a:r>
+          </a:p>
+        </p:txBody>
+      </p:sp>
+      <p:sp>
+        <p:nvSpPr>
+          <p:cNvPr id="30" name="Rectangle 29"/>
           <p:cNvSpPr/>
           <p:nvPr/>
         </p:nvSpPr>
@@ -13948,7 +14052,7 @@
       </p:sp>
       <p:sp>
         <p:nvSpPr>
-          <p:cNvPr id="30" name="TextBox 29"/>
+          <p:cNvPr id="31" name="TextBox 30"/>
           <p:cNvSpPr txBox="1"/>
           <p:nvPr/>
         </p:nvSpPr>
@@ -13989,7 +14093,7 @@
       </p:sp>
       <p:sp>
         <p:nvSpPr>
-          <p:cNvPr id="31" name="TextBox 30"/>
+          <p:cNvPr id="32" name="TextBox 31"/>
           <p:cNvSpPr txBox="1"/>
           <p:nvPr/>
         </p:nvSpPr>
@@ -14048,7 +14152,7 @@
       <p:grpSpPr/>
       <p:sp>
         <p:nvSpPr>
-          <p:cNvPr id="2" name="Oval 1"/>
+          <p:cNvPr id="2" name="deckgen:decor"/>
           <p:cNvSpPr/>
           <p:nvPr/>
         </p:nvSpPr>
@@ -14078,7 +14182,7 @@
       </p:sp>
       <p:sp>
         <p:nvSpPr>
-          <p:cNvPr id="3" name="Oval 2"/>
+          <p:cNvPr id="3" name="deckgen:decor"/>
           <p:cNvSpPr/>
           <p:nvPr/>
         </p:nvSpPr>
@@ -14108,7 +14212,7 @@
       </p:sp>
       <p:sp>
         <p:nvSpPr>
-          <p:cNvPr id="4" name="Oval 3"/>
+          <p:cNvPr id="4" name="deckgen:decor"/>
           <p:cNvSpPr/>
           <p:nvPr/>
         </p:nvSpPr>
@@ -14172,7 +14276,7 @@
                 <a:ea typeface="Pretendard"/>
                 <a:cs typeface="Pretendard"/>
               </a:rPr>
-              <a:t>5·6단계</a:t>
+              <a:t>6단계</a:t>
             </a:r>
           </a:p>
         </p:txBody>
@@ -14213,7 +14317,7 @@
                 <a:ea typeface="Pretendard"/>
                 <a:cs typeface="Pretendard"/>
               </a:rPr>
-              <a:t>Trino 로 쓰기, 그리고 미니 과제</a:t>
+              <a:t>미니 과제 — 채널별 비중과 파일 수</a:t>
             </a:r>
           </a:p>
         </p:txBody>
@@ -14257,7 +14361,7 @@
         <p:spPr>
           <a:xfrm>
             <a:off x="1143000" y="2781300"/>
-            <a:ext cx="1178790" cy="571500"/>
+            <a:ext cx="936724" cy="571500"/>
           </a:xfrm>
           <a:prstGeom prst="rect">
             <a:avLst/>
@@ -14287,7 +14391,7 @@
         <p:spPr>
           <a:xfrm>
             <a:off x="1143000" y="2781300"/>
-            <a:ext cx="1178790" cy="571500"/>
+            <a:ext cx="936724" cy="571500"/>
           </a:xfrm>
           <a:prstGeom prst="rect">
             <a:avLst/>
@@ -14314,7 +14418,7 @@
                 <a:ea typeface="Pretendard"/>
                 <a:cs typeface="Pretendard"/>
               </a:rPr>
-              <a:t>INSERT</a:t>
+              <a:t>과제 1</a:t>
             </a:r>
           </a:p>
         </p:txBody>
@@ -14327,8 +14431,8 @@
         </p:nvSpPr>
         <p:spPr>
           <a:xfrm>
-            <a:off x="2321790" y="2781300"/>
-            <a:ext cx="14823210" cy="571500"/>
+            <a:off x="2079724" y="2781300"/>
+            <a:ext cx="15065276" cy="571500"/>
           </a:xfrm>
           <a:prstGeom prst="rect">
             <a:avLst/>
@@ -14359,8 +14463,8 @@
         </p:nvSpPr>
         <p:spPr>
           <a:xfrm>
-            <a:off x="2474190" y="2781300"/>
-            <a:ext cx="14518410" cy="571500"/>
+            <a:off x="2232124" y="2781300"/>
+            <a:ext cx="14760476" cy="571500"/>
           </a:xfrm>
           <a:prstGeom prst="rect">
             <a:avLst/>
@@ -14387,7 +14491,7 @@
                 <a:ea typeface="Pretendard"/>
                 <a:cs typeface="Pretendard"/>
               </a:rPr>
-              <a:t>(99, 'trino_user', 45000, DATE '2026-08-04', 'web') → 7행</a:t>
+              <a:t>채널별 매출 비중(%) → app 91000.0 55.2 · web 74000.0 44.8</a:t>
             </a:r>
           </a:p>
         </p:txBody>
@@ -14401,7 +14505,7 @@
         <p:spPr>
           <a:xfrm>
             <a:off x="1143000" y="3429000"/>
-            <a:ext cx="1178790" cy="571500"/>
+            <a:ext cx="936724" cy="571500"/>
           </a:xfrm>
           <a:prstGeom prst="rect">
             <a:avLst/>
@@ -14431,7 +14535,7 @@
         <p:spPr>
           <a:xfrm>
             <a:off x="1143000" y="3429000"/>
-            <a:ext cx="1178790" cy="571500"/>
+            <a:ext cx="936724" cy="571500"/>
           </a:xfrm>
           <a:prstGeom prst="rect">
             <a:avLst/>
@@ -14458,7 +14562,7 @@
                 <a:ea typeface="Pretendard"/>
                 <a:cs typeface="Pretendard"/>
               </a:rPr>
-              <a:t>DELETE</a:t>
+              <a:t>관용구</a:t>
             </a:r>
           </a:p>
         </p:txBody>
@@ -14471,8 +14575,8 @@
         </p:nvSpPr>
         <p:spPr>
           <a:xfrm>
-            <a:off x="2321790" y="3429000"/>
-            <a:ext cx="14823210" cy="571500"/>
+            <a:off x="2079724" y="3429000"/>
+            <a:ext cx="15065276" cy="571500"/>
           </a:xfrm>
           <a:prstGeom prst="rect">
             <a:avLst/>
@@ -14503,8 +14607,8 @@
         </p:nvSpPr>
         <p:spPr>
           <a:xfrm>
-            <a:off x="2474190" y="3429000"/>
-            <a:ext cx="14518410" cy="571500"/>
+            <a:off x="2232124" y="3429000"/>
+            <a:ext cx="14760476" cy="571500"/>
           </a:xfrm>
           <a:prstGeom prst="rect">
             <a:avLst/>
@@ -14531,7 +14635,7 @@
                 <a:ea typeface="Pretendard"/>
                 <a:cs typeface="Pretendard"/>
               </a:rPr>
-              <a:t>WHERE order_id = 99 → 6행 · Spark 에서도 같은 값</a:t>
+              <a:t>sum(sum(amount)) OVER () — 집계한 값들의 전체 합을 각 행에</a:t>
             </a:r>
           </a:p>
         </p:txBody>
@@ -14545,7 +14649,7 @@
         <p:spPr>
           <a:xfrm>
             <a:off x="1143000" y="4076700"/>
-            <a:ext cx="1178790" cy="571500"/>
+            <a:ext cx="936724" cy="571500"/>
           </a:xfrm>
           <a:prstGeom prst="rect">
             <a:avLst/>
@@ -14575,7 +14679,7 @@
         <p:spPr>
           <a:xfrm>
             <a:off x="1143000" y="4076700"/>
-            <a:ext cx="1178790" cy="571500"/>
+            <a:ext cx="936724" cy="571500"/>
           </a:xfrm>
           <a:prstGeom prst="rect">
             <a:avLst/>
@@ -14602,7 +14706,7 @@
                 <a:ea typeface="Pretendard"/>
                 <a:cs typeface="Pretendard"/>
               </a:rPr>
-              <a:t>과제 1</a:t>
+              <a:t>과제 2</a:t>
             </a:r>
           </a:p>
         </p:txBody>
@@ -14615,8 +14719,8 @@
         </p:nvSpPr>
         <p:spPr>
           <a:xfrm>
-            <a:off x="2321790" y="4076700"/>
-            <a:ext cx="14823210" cy="571500"/>
+            <a:off x="2079724" y="4076700"/>
+            <a:ext cx="15065276" cy="571500"/>
           </a:xfrm>
           <a:prstGeom prst="rect">
             <a:avLst/>
@@ -14647,8 +14751,8 @@
         </p:nvSpPr>
         <p:spPr>
           <a:xfrm>
-            <a:off x="2474190" y="4076700"/>
-            <a:ext cx="14518410" cy="571500"/>
+            <a:off x="2232124" y="4076700"/>
+            <a:ext cx="14760476" cy="571500"/>
           </a:xfrm>
           <a:prstGeom prst="rect">
             <a:avLst/>
@@ -14675,7 +14779,7 @@
                 <a:ea typeface="Pretendard"/>
                 <a:cs typeface="Pretendard"/>
               </a:rPr>
-              <a:t>채널별 매출 비중(%) — 2-2 의 Window 패턴</a:t>
+              <a:t>daily_sales 를 Trino 에서 갱신 → Spark 에서 확인</a:t>
             </a:r>
           </a:p>
         </p:txBody>
@@ -14689,7 +14793,7 @@
         <p:spPr>
           <a:xfrm>
             <a:off x="1143000" y="4724400"/>
-            <a:ext cx="1178790" cy="571500"/>
+            <a:ext cx="936724" cy="571500"/>
           </a:xfrm>
           <a:prstGeom prst="rect">
             <a:avLst/>
@@ -14719,7 +14823,7 @@
         <p:spPr>
           <a:xfrm>
             <a:off x="1143000" y="4724400"/>
-            <a:ext cx="1178790" cy="571500"/>
+            <a:ext cx="936724" cy="571500"/>
           </a:xfrm>
           <a:prstGeom prst="rect">
             <a:avLst/>
@@ -14746,7 +14850,7 @@
                 <a:ea typeface="Pretendard"/>
                 <a:cs typeface="Pretendard"/>
               </a:rPr>
-              <a:t>과제 2</a:t>
+              <a:t>과제 3</a:t>
             </a:r>
           </a:p>
         </p:txBody>
@@ -14759,8 +14863,8 @@
         </p:nvSpPr>
         <p:spPr>
           <a:xfrm>
-            <a:off x="2321790" y="4724400"/>
-            <a:ext cx="14823210" cy="571500"/>
+            <a:off x="2079724" y="4724400"/>
+            <a:ext cx="15065276" cy="571500"/>
           </a:xfrm>
           <a:prstGeom prst="rect">
             <a:avLst/>
@@ -14791,8 +14895,8 @@
         </p:nvSpPr>
         <p:spPr>
           <a:xfrm>
-            <a:off x="2474190" y="4724400"/>
-            <a:ext cx="14518410" cy="571500"/>
+            <a:off x="2232124" y="4724400"/>
+            <a:ext cx="14760476" cy="571500"/>
           </a:xfrm>
           <a:prstGeom prst="rect">
             <a:avLst/>
@@ -14819,27 +14923,68 @@
                 <a:ea typeface="Pretendard"/>
                 <a:cs typeface="Pretendard"/>
               </a:rPr>
-              <a:t>daily_sales 를 Trino 에서 갱신 → Spark 에서 확인</a:t>
-            </a:r>
-          </a:p>
-        </p:txBody>
-      </p:sp>
-      <p:sp>
-        <p:nvSpPr>
-          <p:cNvPr id="24" name="Rectangle 23"/>
-          <p:cNvSpPr/>
-          <p:nvPr/>
-        </p:nvSpPr>
-        <p:spPr>
-          <a:xfrm>
-            <a:off x="1143000" y="5372100"/>
-            <a:ext cx="1178790" cy="571500"/>
-          </a:xfrm>
-          <a:prstGeom prst="rect">
-            <a:avLst/>
-          </a:prstGeom>
-          <a:solidFill>
-            <a:srgbClr val="0D2B5E"/>
+              <a:t>"orders$files" 로 데이터 파일 수와 각 행 수</a:t>
+            </a:r>
+          </a:p>
+        </p:txBody>
+      </p:sp>
+      <p:sp>
+        <p:nvSpPr>
+          <p:cNvPr id="24" name="TextBox 23"/>
+          <p:cNvSpPr txBox="1"/>
+          <p:nvPr/>
+        </p:nvSpPr>
+        <p:spPr>
+          <a:xfrm>
+            <a:off x="1143000" y="7620000"/>
+            <a:ext cx="16002000" cy="342900"/>
+          </a:xfrm>
+          <a:prstGeom prst="rect">
+            <a:avLst/>
+          </a:prstGeom>
+          <a:noFill/>
+        </p:spPr>
+        <p:txBody>
+          <a:bodyPr wrap="square" lIns="0" rIns="0" tIns="0" bIns="0" anchor="t">
+            <a:spAutoFit/>
+          </a:bodyPr>
+          <a:lstStyle/>
+          <a:p>
+            <a:pPr algn="l">
+              <a:lnSpc>
+                <a:spcPct val="100000"/>
+              </a:lnSpc>
+            </a:pPr>
+            <a:r>
+              <a:rPr sz="1875" b="1">
+                <a:solidFill>
+                  <a:srgbClr val="7D7D7D"/>
+                </a:solidFill>
+                <a:latin typeface="Pretendard"/>
+                <a:ea typeface="Pretendard"/>
+                <a:cs typeface="Pretendard"/>
+              </a:rPr>
+              <a:t>round(sum(amount) * 100.0 / sum(sum(amount)) OVER (), 1) AS pct — 두 비중의 합이 100 이면 성공</a:t>
+            </a:r>
+          </a:p>
+        </p:txBody>
+      </p:sp>
+      <p:sp>
+        <p:nvSpPr>
+          <p:cNvPr id="25" name="Rectangle 24"/>
+          <p:cNvSpPr/>
+          <p:nvPr/>
+        </p:nvSpPr>
+        <p:spPr>
+          <a:xfrm>
+            <a:off x="1143000" y="8058150"/>
+            <a:ext cx="16002000" cy="9525"/>
+          </a:xfrm>
+          <a:prstGeom prst="rect">
+            <a:avLst/>
+          </a:prstGeom>
+          <a:solidFill>
+            <a:srgbClr val="DCE1E8"/>
           </a:solidFill>
           <a:ln>
             <a:noFill/>
@@ -14856,192 +15001,7 @@
       </p:sp>
       <p:sp>
         <p:nvSpPr>
-          <p:cNvPr id="25" name="TextBox 24"/>
-          <p:cNvSpPr txBox="1"/>
-          <p:nvPr/>
-        </p:nvSpPr>
-        <p:spPr>
-          <a:xfrm>
-            <a:off x="1143000" y="5372100"/>
-            <a:ext cx="1178790" cy="571500"/>
-          </a:xfrm>
-          <a:prstGeom prst="rect">
-            <a:avLst/>
-          </a:prstGeom>
-          <a:noFill/>
-        </p:spPr>
-        <p:txBody>
-          <a:bodyPr wrap="square" lIns="0" rIns="0" tIns="0" bIns="0" anchor="ctr">
-            <a:spAutoFit/>
-          </a:bodyPr>
-          <a:lstStyle/>
-          <a:p>
-            <a:pPr algn="ctr">
-              <a:lnSpc>
-                <a:spcPct val="100000"/>
-              </a:lnSpc>
-            </a:pPr>
-            <a:r>
-              <a:rPr sz="1800" b="1">
-                <a:solidFill>
-                  <a:srgbClr val="FFFFFF"/>
-                </a:solidFill>
-                <a:latin typeface="Pretendard"/>
-                <a:ea typeface="Pretendard"/>
-                <a:cs typeface="Pretendard"/>
-              </a:rPr>
-              <a:t>과제 3</a:t>
-            </a:r>
-          </a:p>
-        </p:txBody>
-      </p:sp>
-      <p:sp>
-        <p:nvSpPr>
-          <p:cNvPr id="26" name="Rectangle 25"/>
-          <p:cNvSpPr/>
-          <p:nvPr/>
-        </p:nvSpPr>
-        <p:spPr>
-          <a:xfrm>
-            <a:off x="2321790" y="5372100"/>
-            <a:ext cx="14823210" cy="571500"/>
-          </a:xfrm>
-          <a:prstGeom prst="rect">
-            <a:avLst/>
-          </a:prstGeom>
-          <a:solidFill>
-            <a:srgbClr val="FAFBFD"/>
-          </a:solidFill>
-          <a:ln w="9525">
-            <a:solidFill>
-              <a:srgbClr val="DCE1E8"/>
-            </a:solidFill>
-          </a:ln>
-          <a:effectLst/>
-        </p:spPr>
-        <p:txBody>
-          <a:bodyPr rtlCol="0" anchor="ctr" wrap="square"/>
-          <a:lstStyle/>
-          <a:p>
-            <a:pPr algn="ctr"/>
-          </a:p>
-        </p:txBody>
-      </p:sp>
-      <p:sp>
-        <p:nvSpPr>
-          <p:cNvPr id="27" name="TextBox 26"/>
-          <p:cNvSpPr txBox="1"/>
-          <p:nvPr/>
-        </p:nvSpPr>
-        <p:spPr>
-          <a:xfrm>
-            <a:off x="2474190" y="5372100"/>
-            <a:ext cx="14518410" cy="571500"/>
-          </a:xfrm>
-          <a:prstGeom prst="rect">
-            <a:avLst/>
-          </a:prstGeom>
-          <a:noFill/>
-        </p:spPr>
-        <p:txBody>
-          <a:bodyPr wrap="square" lIns="0" rIns="0" tIns="0" bIns="0" anchor="ctr">
-            <a:spAutoFit/>
-          </a:bodyPr>
-          <a:lstStyle/>
-          <a:p>
-            <a:pPr algn="l">
-              <a:lnSpc>
-                <a:spcPct val="115000"/>
-              </a:lnSpc>
-            </a:pPr>
-            <a:r>
-              <a:rPr sz="1800" b="0">
-                <a:solidFill>
-                  <a:srgbClr val="3D3D3D"/>
-                </a:solidFill>
-                <a:latin typeface="Pretendard"/>
-                <a:ea typeface="Pretendard"/>
-                <a:cs typeface="Pretendard"/>
-              </a:rPr>
-              <a:t>"orders$files" 로 데이터 파일 수와 각 행 수</a:t>
-            </a:r>
-          </a:p>
-        </p:txBody>
-      </p:sp>
-      <p:sp>
-        <p:nvSpPr>
-          <p:cNvPr id="28" name="TextBox 27"/>
-          <p:cNvSpPr txBox="1"/>
-          <p:nvPr/>
-        </p:nvSpPr>
-        <p:spPr>
-          <a:xfrm>
-            <a:off x="1143000" y="7620000"/>
-            <a:ext cx="16002000" cy="342900"/>
-          </a:xfrm>
-          <a:prstGeom prst="rect">
-            <a:avLst/>
-          </a:prstGeom>
-          <a:noFill/>
-        </p:spPr>
-        <p:txBody>
-          <a:bodyPr wrap="square" lIns="0" rIns="0" tIns="0" bIns="0" anchor="t">
-            <a:spAutoFit/>
-          </a:bodyPr>
-          <a:lstStyle/>
-          <a:p>
-            <a:pPr algn="l">
-              <a:lnSpc>
-                <a:spcPct val="100000"/>
-              </a:lnSpc>
-            </a:pPr>
-            <a:r>
-              <a:rPr sz="1875" b="1">
-                <a:solidFill>
-                  <a:srgbClr val="7D7D7D"/>
-                </a:solidFill>
-                <a:latin typeface="Pretendard"/>
-                <a:ea typeface="Pretendard"/>
-                <a:cs typeface="Pretendard"/>
-              </a:rPr>
-              <a:t>round(sum(amount) * 100.0 / sum(sum(amount)) OVER (), 1) AS pct — 비중의 합이 100 에 가까우면 성공</a:t>
-            </a:r>
-          </a:p>
-        </p:txBody>
-      </p:sp>
-      <p:sp>
-        <p:nvSpPr>
-          <p:cNvPr id="29" name="Rectangle 28"/>
-          <p:cNvSpPr/>
-          <p:nvPr/>
-        </p:nvSpPr>
-        <p:spPr>
-          <a:xfrm>
-            <a:off x="1143000" y="8058150"/>
-            <a:ext cx="16002000" cy="9525"/>
-          </a:xfrm>
-          <a:prstGeom prst="rect">
-            <a:avLst/>
-          </a:prstGeom>
-          <a:solidFill>
-            <a:srgbClr val="DCE1E8"/>
-          </a:solidFill>
-          <a:ln>
-            <a:noFill/>
-          </a:ln>
-          <a:effectLst/>
-        </p:spPr>
-        <p:txBody>
-          <a:bodyPr rtlCol="0" anchor="ctr" wrap="square"/>
-          <a:lstStyle/>
-          <a:p>
-            <a:pPr algn="ctr"/>
-          </a:p>
-        </p:txBody>
-      </p:sp>
-      <p:sp>
-        <p:nvSpPr>
-          <p:cNvPr id="30" name="TextBox 29"/>
+          <p:cNvPr id="26" name="TextBox 25"/>
           <p:cNvSpPr txBox="1"/>
           <p:nvPr/>
         </p:nvSpPr>
@@ -15082,7 +15042,7 @@
       </p:sp>
       <p:sp>
         <p:nvSpPr>
-          <p:cNvPr id="31" name="TextBox 30"/>
+          <p:cNvPr id="27" name="TextBox 26"/>
           <p:cNvSpPr txBox="1"/>
           <p:nvPr/>
         </p:nvSpPr>
